--- a/ground-vehicle/docs/courses/advanced/l2_motors_and_ramping.pptx
+++ b/ground-vehicle/docs/courses/advanced/l2_motors_and_ramping.pptx
@@ -11036,7 +11036,7 @@
         <p:spPr>
           <a:xfrm>
             <a:off x="502920" y="1188720"/>
-            <a:ext cx="4839335" cy="457200"/>
+            <a:ext cx="4669028" cy="457200"/>
           </a:xfrm>
           <a:prstGeom prst="rect">
             <a:avLst/>
@@ -11084,7 +11084,7 @@
         <p:spPr>
           <a:xfrm>
             <a:off x="502920" y="1700784"/>
-            <a:ext cx="4839335" cy="4562856"/>
+            <a:ext cx="4669028" cy="4562856"/>
           </a:xfrm>
           <a:prstGeom prst="rect">
             <a:avLst/>
@@ -11104,15 +11104,15 @@
               <a:spcAft>
                 <a:spcPts val="800"/>
               </a:spcAft>
-              <a:defRPr sz="1900" b="0">
-                <a:solidFill>
-                  <a:srgbClr val="222222"/>
-                </a:solidFill>
-                <a:latin typeface="Calibri"/>
-              </a:defRPr>
-            </a:pPr>
-            <a:r>
-              <a:rPr sz="1900" b="0">
+              <a:defRPr sz="1800" b="0">
+                <a:solidFill>
+                  <a:srgbClr val="222222"/>
+                </a:solidFill>
+                <a:latin typeface="Calibri"/>
+              </a:defRPr>
+            </a:pPr>
+            <a:r>
+              <a:rPr sz="1800" b="0">
                 <a:solidFill>
                   <a:srgbClr val="222222"/>
                 </a:solidFill>
@@ -11129,15 +11129,15 @@
               <a:spcAft>
                 <a:spcPts val="800"/>
               </a:spcAft>
-              <a:defRPr sz="1900" b="0">
-                <a:solidFill>
-                  <a:srgbClr val="222222"/>
-                </a:solidFill>
-                <a:latin typeface="Calibri"/>
-              </a:defRPr>
-            </a:pPr>
-            <a:r>
-              <a:rPr sz="1900" b="0">
+              <a:defRPr sz="1800" b="0">
+                <a:solidFill>
+                  <a:srgbClr val="222222"/>
+                </a:solidFill>
+                <a:latin typeface="Calibri"/>
+              </a:defRPr>
+            </a:pPr>
+            <a:r>
+              <a:rPr sz="1800" b="0">
                 <a:solidFill>
                   <a:srgbClr val="222222"/>
                 </a:solidFill>
@@ -11154,7 +11154,7 @@
               <a:spcAft>
                 <a:spcPts val="800"/>
               </a:spcAft>
-              <a:defRPr sz="950" b="0">
+              <a:defRPr sz="900" b="0">
                 <a:solidFill>
                   <a:srgbClr val="222222"/>
                 </a:solidFill>
@@ -11170,15 +11170,15 @@
               <a:spcAft>
                 <a:spcPts val="800"/>
               </a:spcAft>
-              <a:defRPr sz="1900" b="0">
-                <a:solidFill>
-                  <a:srgbClr val="222222"/>
-                </a:solidFill>
-                <a:latin typeface="Calibri"/>
-              </a:defRPr>
-            </a:pPr>
-            <a:r>
-              <a:rPr sz="1900" b="0">
+              <a:defRPr sz="1800" b="0">
+                <a:solidFill>
+                  <a:srgbClr val="222222"/>
+                </a:solidFill>
+                <a:latin typeface="Calibri"/>
+              </a:defRPr>
+            </a:pPr>
+            <a:r>
+              <a:rPr sz="1800" b="0">
                 <a:solidFill>
                   <a:srgbClr val="222222"/>
                 </a:solidFill>
@@ -11195,7 +11195,7 @@
               <a:spcAft>
                 <a:spcPts val="800"/>
               </a:spcAft>
-              <a:defRPr sz="950" b="0">
+              <a:defRPr sz="900" b="0">
                 <a:solidFill>
                   <a:srgbClr val="222222"/>
                 </a:solidFill>
@@ -11211,15 +11211,15 @@
               <a:spcAft>
                 <a:spcPts val="800"/>
               </a:spcAft>
-              <a:defRPr sz="1900" b="0">
-                <a:solidFill>
-                  <a:srgbClr val="222222"/>
-                </a:solidFill>
-                <a:latin typeface="Calibri"/>
-              </a:defRPr>
-            </a:pPr>
-            <a:r>
-              <a:rPr sz="1900" b="0">
+              <a:defRPr sz="1800" b="0">
+                <a:solidFill>
+                  <a:srgbClr val="222222"/>
+                </a:solidFill>
+                <a:latin typeface="Calibri"/>
+              </a:defRPr>
+            </a:pPr>
+            <a:r>
+              <a:rPr sz="1800" b="0">
                 <a:solidFill>
                   <a:srgbClr val="222222"/>
                 </a:solidFill>
@@ -11238,8 +11238,8 @@
         </p:nvSpPr>
         <p:spPr>
           <a:xfrm>
-            <a:off x="5799455" y="1188720"/>
-            <a:ext cx="5889320" cy="457200"/>
+            <a:off x="5629148" y="1188720"/>
+            <a:ext cx="6059627" cy="457200"/>
           </a:xfrm>
           <a:prstGeom prst="rect">
             <a:avLst/>
@@ -11286,8 +11286,8 @@
         </p:nvSpPr>
         <p:spPr>
           <a:xfrm>
-            <a:off x="5799455" y="1700784"/>
-            <a:ext cx="5889320" cy="4562856"/>
+            <a:off x="5629148" y="1700784"/>
+            <a:ext cx="6059627" cy="4562856"/>
           </a:xfrm>
           <a:prstGeom prst="rect">
             <a:avLst/>
@@ -11321,7 +11321,7 @@
                 </a:solidFill>
                 <a:latin typeface="Calibri"/>
               </a:rPr>
-              <a:t>Each servo owns one DIRECTION of the stick and sweeps its full travel across half the range:</a:t>
+              <a:t>Each servo owns one DIRECTION of the stick, and pushing that way moves it from center to one end, about 90 degrees:</a:t>
             </a:r>
           </a:p>
           <a:p>
